--- a/youtube_ranking_20260510.pptx
+++ b/youtube_ranking_20260510.pptx
@@ -3474,7 +3474,7 @@
                 </a:solidFill>
                 <a:latin typeface="Arial"/>
               </a:rPr>
-              <a:t>👁  11,148 回視聴</a:t>
+              <a:t>👁  15,216 回視聴</a:t>
             </a:r>
           </a:p>
         </p:txBody>
@@ -3784,7 +3784,7 @@
                 </a:solidFill>
                 <a:latin typeface="Arial"/>
               </a:rPr>
-              <a:t>📺 夢追翔のJUKE BOX  ·  👁 724,783 回視聴</a:t>
+              <a:t>📺 夢追翔のJUKE BOX  ·  👁 758,413 回視聴</a:t>
             </a:r>
           </a:p>
         </p:txBody>
@@ -4050,7 +4050,7 @@
                 </a:solidFill>
                 <a:latin typeface="Arial"/>
               </a:rPr>
-              <a:t>📺 やっさん2  ·  👁 19,138,283 回視聴</a:t>
+              <a:t>📺 やっさん2  ·  👁 19,138,432 回視聴</a:t>
             </a:r>
           </a:p>
         </p:txBody>
@@ -4392,7 +4392,7 @@
                 </a:solidFill>
                 <a:latin typeface="Arial"/>
               </a:rPr>
-              <a:t>📺 ごっこ倶楽部のウラ垢 - STUDIO GOKKO -  ·  👁 12,780,661 回視聴</a:t>
+              <a:t>📺 ごっこ倶楽部のウラ垢 - STUDIO GOKKO -  ·  👁 12,780,671 回視聴</a:t>
             </a:r>
           </a:p>
         </p:txBody>
@@ -4563,7 +4563,7 @@
                 </a:solidFill>
                 <a:latin typeface="Arial"/>
               </a:rPr>
-              <a:t>📺 はるえもん  ·  👁 11,678,282 回視聴</a:t>
+              <a:t>📺 はるえもん  ·  👁 11,678,507 回視聴</a:t>
             </a:r>
           </a:p>
         </p:txBody>
@@ -4734,7 +4734,7 @@
                 </a:solidFill>
                 <a:latin typeface="Arial"/>
               </a:rPr>
-              <a:t>📺 やっさん2  ·  👁 11,440,257 回視聴</a:t>
+              <a:t>📺 やっさん2  ·  👁 11,440,978 回視聴</a:t>
             </a:r>
           </a:p>
         </p:txBody>
@@ -5000,7 +5000,7 @@
                 </a:solidFill>
                 <a:latin typeface="Arial"/>
               </a:rPr>
-              <a:t>📺 ウッドリィ  ·  👁 24,655,913 回視聴</a:t>
+              <a:t>📺 ウッドリィ  ·  👁 24,658,981 回視聴</a:t>
             </a:r>
           </a:p>
         </p:txBody>
@@ -5171,7 +5171,7 @@
                 </a:solidFill>
                 <a:latin typeface="Arial"/>
               </a:rPr>
-              <a:t>📺 にこみチャンネル  ·  👁 20,444,539 回視聴</a:t>
+              <a:t>📺 にこみチャンネル  ·  👁 20,444,551 回視聴</a:t>
             </a:r>
           </a:p>
         </p:txBody>
@@ -5342,7 +5342,7 @@
                 </a:solidFill>
                 <a:latin typeface="Arial"/>
               </a:rPr>
-              <a:t>📺 タン  ·  👁 19,793,347 回視聴</a:t>
+              <a:t>📺 タン  ·  👁 19,793,546 回視聴</a:t>
             </a:r>
           </a:p>
         </p:txBody>
@@ -5513,7 +5513,7 @@
                 </a:solidFill>
                 <a:latin typeface="Arial"/>
               </a:rPr>
-              <a:t>📺 ゼロ / ZERO  ·  👁 18,634,979 回視聴</a:t>
+              <a:t>📺 ゼロ / ZERO  ·  👁 18,635,036 回視聴</a:t>
             </a:r>
           </a:p>
         </p:txBody>
@@ -5684,7 +5684,7 @@
                 </a:solidFill>
                 <a:latin typeface="Arial"/>
               </a:rPr>
-              <a:t>📺 葉ちゅべ  ·  👁 18,294,512 回視聴</a:t>
+              <a:t>📺 葉ちゅべ  ·  👁 18,295,035 回視聴</a:t>
             </a:r>
           </a:p>
         </p:txBody>
@@ -5950,7 +5950,7 @@
                 </a:solidFill>
                 <a:latin typeface="Arial"/>
               </a:rPr>
-              <a:t>📺 アニメキッズanimekids  ·  👁 44,202,450 回視聴</a:t>
+              <a:t>📺 アニメキッズanimekids  ·  👁 44,203,775 回視聴</a:t>
             </a:r>
           </a:p>
         </p:txBody>
@@ -6121,7 +6121,7 @@
                 </a:solidFill>
                 <a:latin typeface="Arial"/>
               </a:rPr>
-              <a:t>📺 ノッカーナアニメーション nokkana animation  ·  👁 41,169,267 回視聴</a:t>
+              <a:t>📺 ノッカーナアニメーション nokkana animation  ·  👁 41,172,445 回視聴</a:t>
             </a:r>
           </a:p>
         </p:txBody>
@@ -6292,7 +6292,7 @@
                 </a:solidFill>
                 <a:latin typeface="Arial"/>
               </a:rPr>
-              <a:t>📺 TOHO animation チャンネル  ·  👁 33,171,563 回視聴</a:t>
+              <a:t>📺 TOHO animation チャンネル  ·  👁 33,185,038 回視聴</a:t>
             </a:r>
           </a:p>
         </p:txBody>
@@ -6463,7 +6463,7 @@
                 </a:solidFill>
                 <a:latin typeface="Arial"/>
               </a:rPr>
-              <a:t>📺 TOHO animation チャンネル  ·  👁 30,332,898 回視聴</a:t>
+              <a:t>📺 TOHO animation チャンネル  ·  👁 30,335,360 回視聴</a:t>
             </a:r>
           </a:p>
         </p:txBody>
@@ -6634,7 +6634,7 @@
                 </a:solidFill>
                 <a:latin typeface="Arial"/>
               </a:rPr>
-              <a:t>📺 EGOIST Official YouTube Channel  ·  👁 23,761,918 回視聴</a:t>
+              <a:t>📺 EGOIST Official YouTube Channel  ·  👁 23,763,895 回視聴</a:t>
             </a:r>
           </a:p>
         </p:txBody>
@@ -6900,7 +6900,7 @@
                 </a:solidFill>
                 <a:latin typeface="Arial"/>
               </a:rPr>
-              <a:t>📺 正直レビュー 🍰🍛  ·  👁 6,788,194 回視聴</a:t>
+              <a:t>📺 正直レビュー 🍰🍛  ·  👁 6,788,300 回視聴</a:t>
             </a:r>
           </a:p>
         </p:txBody>
@@ -7071,7 +7071,7 @@
                 </a:solidFill>
                 <a:latin typeface="Arial"/>
               </a:rPr>
-              <a:t>📺 KABUKU. / 市川團十郎。  ·  👁 3,484,137 回視聴</a:t>
+              <a:t>📺 KABUKU. / 市川團十郎。  ·  👁 3,484,199 回視聴</a:t>
             </a:r>
           </a:p>
         </p:txBody>
@@ -7242,7 +7242,7 @@
                 </a:solidFill>
                 <a:latin typeface="Arial"/>
               </a:rPr>
-              <a:t>📺 東海オンエア  ·  👁 3,299,527 回視聴</a:t>
+              <a:t>📺 東海オンエア  ·  👁 3,300,044 回視聴</a:t>
             </a:r>
           </a:p>
         </p:txBody>
@@ -7413,7 +7413,7 @@
                 </a:solidFill>
                 <a:latin typeface="Arial"/>
               </a:rPr>
-              <a:t>📺 ホッカイロレン  ·  👁 3,252,875 回視聴</a:t>
+              <a:t>📺 ホッカイロレン  ·  👁 3,253,154 回視聴</a:t>
             </a:r>
           </a:p>
         </p:txBody>
@@ -7584,7 +7584,7 @@
                 </a:solidFill>
                 <a:latin typeface="Arial"/>
               </a:rPr>
-              <a:t>📺 2ch有益プラネット【ゆっくり解説】  ·  👁 2,939,730 回視聴</a:t>
+              <a:t>📺 2ch有益プラネット【ゆっくり解説】  ·  👁 2,940,147 回視聴</a:t>
             </a:r>
           </a:p>
         </p:txBody>
@@ -7805,7 +7805,7 @@
                 </a:solidFill>
                 <a:latin typeface="Arial"/>
               </a:rPr>
-              <a:t>👁  51,140 回視聴</a:t>
+              <a:t>👁  74,152 回視聴</a:t>
             </a:r>
           </a:p>
         </p:txBody>
@@ -7992,7 +7992,7 @@
                 </a:solidFill>
                 <a:latin typeface="Arial"/>
               </a:rPr>
-              <a:t>【ツムツム】新ツムのやつをやる！！ガーディアンルーク</a:t>
+              <a:t>【スマブラSP】第69回スマバトSP ft sparg0,Miya,Asimo,らる,Wrath,りゅーおー,らき,からあげ,マイルドなH,O,ラリックス,さや and more!!【関西オフ大会】</a:t>
             </a:r>
           </a:p>
         </p:txBody>
@@ -8026,7 +8026,7 @@
                 </a:solidFill>
                 <a:latin typeface="Arial"/>
               </a:rPr>
-              <a:t>📺  とある高校生がツムツムをしてみた</a:t>
+              <a:t>📺  Westerlies Gaming</a:t>
             </a:r>
           </a:p>
         </p:txBody>
@@ -8060,7 +8060,7 @@
                 </a:solidFill>
                 <a:latin typeface="Arial"/>
               </a:rPr>
-              <a:t>👁  141,385 回視聴</a:t>
+              <a:t>👁  222,436 回視聴</a:t>
             </a:r>
           </a:p>
         </p:txBody>
@@ -8094,7 +8094,7 @@
                 </a:solidFill>
                 <a:latin typeface="Arial"/>
               </a:rPr>
-              <a:t>https://www.youtube.com/watch?v=rxl5S0tSoOM</a:t>
+              <a:t>https://www.youtube.com/watch?v=7Qx9Crvya50</a:t>
             </a:r>
           </a:p>
         </p:txBody>
@@ -8247,7 +8247,7 @@
                 </a:solidFill>
                 <a:latin typeface="Arial"/>
               </a:rPr>
-              <a:t>BE:FIRST / Rondo -Behind The Scenes-</a:t>
+              <a:t>『ルージュの伝言｜松任谷由実』 acoustic cover.</a:t>
             </a:r>
           </a:p>
         </p:txBody>
@@ -8281,7 +8281,7 @@
                 </a:solidFill>
                 <a:latin typeface="Arial"/>
               </a:rPr>
-              <a:t>📺  BE:FIRST Official</a:t>
+              <a:t>📺  優里ちゃんねる【公式】</a:t>
             </a:r>
           </a:p>
         </p:txBody>
@@ -8315,7 +8315,7 @@
                 </a:solidFill>
                 <a:latin typeface="Arial"/>
               </a:rPr>
-              <a:t>👁  230,399 回視聴</a:t>
+              <a:t>👁  108,072 回視聴</a:t>
             </a:r>
           </a:p>
         </p:txBody>
@@ -8349,7 +8349,7 @@
                 </a:solidFill>
                 <a:latin typeface="Arial"/>
               </a:rPr>
-              <a:t>https://www.youtube.com/watch?v=uS2q1mmyGk8</a:t>
+              <a:t>https://www.youtube.com/watch?v=7DbiY5492zU</a:t>
             </a:r>
           </a:p>
         </p:txBody>
@@ -8502,7 +8502,7 @@
                 </a:solidFill>
                 <a:latin typeface="Arial"/>
               </a:rPr>
-              <a:t>【対決】1日かけてポケGOで捕まえたポケモン同士を戦わせたらまさかの結果に！？！！</a:t>
+              <a:t>宇多田さんとテトリスをしました</a:t>
             </a:r>
           </a:p>
         </p:txBody>
@@ -8536,7 +8536,7 @@
                 </a:solidFill>
                 <a:latin typeface="Arial"/>
               </a:rPr>
-              <a:t>📺  Lazy Lie Crazy【レイクレ】</a:t>
+              <a:t>📺  佐藤 健 / Satoh Takeru</a:t>
             </a:r>
           </a:p>
         </p:txBody>
@@ -8570,7 +8570,7 @@
                 </a:solidFill>
                 <a:latin typeface="Arial"/>
               </a:rPr>
-              <a:t>👁  341,232 回視聴</a:t>
+              <a:t>👁  1,418,596 回視聴</a:t>
             </a:r>
           </a:p>
         </p:txBody>
@@ -8604,7 +8604,7 @@
                 </a:solidFill>
                 <a:latin typeface="Arial"/>
               </a:rPr>
-              <a:t>https://www.youtube.com/watch?v=G1w-XgyfbLM</a:t>
+              <a:t>https://www.youtube.com/watch?v=YcoyPs1Og2Y</a:t>
             </a:r>
           </a:p>
         </p:txBody>
@@ -8757,7 +8757,7 @@
                 </a:solidFill>
                 <a:latin typeface="Arial"/>
               </a:rPr>
-              <a:t>『ルージュの伝言｜松任谷由実』 acoustic cover.</a:t>
+              <a:t>かりゆし58 - アンマー / THE FIRST TAKE</a:t>
             </a:r>
           </a:p>
         </p:txBody>
@@ -8791,7 +8791,7 @@
                 </a:solidFill>
                 <a:latin typeface="Arial"/>
               </a:rPr>
-              <a:t>📺  優里ちゃんねる【公式】</a:t>
+              <a:t>📺  THE FIRST TAKE</a:t>
             </a:r>
           </a:p>
         </p:txBody>
@@ -8825,7 +8825,7 @@
                 </a:solidFill>
                 <a:latin typeface="Arial"/>
               </a:rPr>
-              <a:t>👁  98,243 回視聴</a:t>
+              <a:t>👁  471,370 回視聴</a:t>
             </a:r>
           </a:p>
         </p:txBody>
@@ -8859,7 +8859,7 @@
                 </a:solidFill>
                 <a:latin typeface="Arial"/>
               </a:rPr>
-              <a:t>https://www.youtube.com/watch?v=7DbiY5492zU</a:t>
+              <a:t>https://www.youtube.com/watch?v=OUGCI8DZ12k</a:t>
             </a:r>
           </a:p>
         </p:txBody>
@@ -9080,7 +9080,7 @@
                 </a:solidFill>
                 <a:latin typeface="Arial"/>
               </a:rPr>
-              <a:t>👁  102,084 回視聴</a:t>
+              <a:t>👁  160,680 回視聴</a:t>
             </a:r>
           </a:p>
         </p:txBody>
@@ -9267,7 +9267,7 @@
                 </a:solidFill>
                 <a:latin typeface="Arial"/>
               </a:rPr>
-              <a:t>かりゆし58 - アンマー / THE FIRST TAKE</a:t>
+              <a:t>【Ado】春に舞う -『今日、好きになりました。』ver.</a:t>
             </a:r>
           </a:p>
         </p:txBody>
@@ -9301,7 +9301,7 @@
                 </a:solidFill>
                 <a:latin typeface="Arial"/>
               </a:rPr>
-              <a:t>📺  THE FIRST TAKE</a:t>
+              <a:t>📺  Ado</a:t>
             </a:r>
           </a:p>
         </p:txBody>
@@ -9335,7 +9335,7 @@
                 </a:solidFill>
                 <a:latin typeface="Arial"/>
               </a:rPr>
-              <a:t>👁  449,107 回視聴</a:t>
+              <a:t>👁  116,054 回視聴</a:t>
             </a:r>
           </a:p>
         </p:txBody>
@@ -9369,7 +9369,7 @@
                 </a:solidFill>
                 <a:latin typeface="Arial"/>
               </a:rPr>
-              <a:t>https://www.youtube.com/watch?v=OUGCI8DZ12k</a:t>
+              <a:t>https://www.youtube.com/watch?v=NCGL-YdhNCA</a:t>
             </a:r>
           </a:p>
         </p:txBody>
@@ -9522,7 +9522,7 @@
                 </a:solidFill>
                 <a:latin typeface="Arial"/>
               </a:rPr>
-              <a:t>宇多田さんとテトリスをしました</a:t>
+              <a:t>自由な住民たちの生活を見守る神ゲー『 トモダチコレクション わくわく生活 』～大恋愛～</a:t>
             </a:r>
           </a:p>
         </p:txBody>
@@ -9556,7 +9556,7 @@
                 </a:solidFill>
                 <a:latin typeface="Arial"/>
               </a:rPr>
-              <a:t>📺  佐藤 健 / Satoh Takeru</a:t>
+              <a:t>📺  キヨ。</a:t>
             </a:r>
           </a:p>
         </p:txBody>
@@ -9590,7 +9590,7 @@
                 </a:solidFill>
                 <a:latin typeface="Arial"/>
               </a:rPr>
-              <a:t>👁  1,272,180 回視聴</a:t>
+              <a:t>👁  201,989 回視聴</a:t>
             </a:r>
           </a:p>
         </p:txBody>
@@ -9624,7 +9624,7 @@
                 </a:solidFill>
                 <a:latin typeface="Arial"/>
               </a:rPr>
-              <a:t>https://www.youtube.com/watch?v=YcoyPs1Og2Y</a:t>
+              <a:t>https://www.youtube.com/watch?v=y__j0ezIAL8</a:t>
             </a:r>
           </a:p>
         </p:txBody>
